--- a/cursos/recursos/arbitro-nacional/09-dispositivos-electronicos-ayuda-externa-y-la-escala-de-sanciones.pptx
+++ b/cursos/recursos/arbitro-nacional/09-dispositivos-electronicos-ayuda-externa-y-la-escala-de-sanciones.pptx
@@ -3712,7 +3712,7 @@
                 </a:solidFill>
                 <a:latin typeface="Calibri"/>
               </a:rPr>
-              <a:t>El artículo 11.3 prohíbe tener un dispositivo electrónico de comunicación (encendido o no, salvo que el reglamento del torneo lo autorice expresamente) en la zona de juego durante la partida, y el 11.3.2 puede llegar a la pérdida de la partida si se comprueba que un jugador lo usó para recibir ayuda al jugar — no basta con que suene un celular, aunque eso también se sanciona.</a:t>
+              <a:t>El artículo 11.3.2 es de tolerancia cero, y eso hay que decirlo sin matices: si es evidente que un jugador TIENE un dispositivo electrónico no autorizado encima, en la zona de juego, pierde la partida — no hace falta probar que lo usó, ni que estuviera encendido. Un celular apagado en el bolsillo pierde la partida igual que uno sonando. El reglamento de un torneo puede prever una sanción menos severa (pensado para el ajedrez de base), pero tiene que estar escrita y anunciada antes, no improvisada en la mesa.</a:t>
             </a:r>
           </a:p>
         </p:txBody>
@@ -4696,7 +4696,7 @@
                 </a:solidFill>
                 <a:latin typeface="Cambria"/>
               </a:rPr>
-              <a:t>Redactar tres situaciones de conducta (un celular que suena sin usarse, un jugador que consulta su reloj de pulsera con notas escritas, y un reclamo de jugada ilegal presentado tres veces en la misma ronda sin fundamento) y decidir, para cada una, en qué escalón del artículo 12.9 empezar y por qué.</a:t>
+              <a:t>Redactar tres situaciones de conducta (un celular apagado que se encuentra en el bolsillo de un jugador, un jugador que consulta su reloj de pulsera con notas escritas, y un reclamo de jugada ilegal presentado tres veces en la misma ronda sin fundamento) y decidir, para cada una, si corresponde la pérdida automática del artículo 11.3.2.2 o un escalón discrecional del artículo 12.9 — y en ese segundo caso, cuál y por qué.</a:t>
             </a:r>
           </a:p>
         </p:txBody>
